--- a/OSM_Pandana_Lecture-revised-final.pptx
+++ b/OSM_Pandana_Lecture-revised-final.pptx
@@ -14137,63 +14137,6 @@
                 <a:cs typeface="Helvetica Neue"/>
               </a:rPr>
               <a:t>10 minutes</a:t>
-            </a:r>
-          </a:p>
-        </p:txBody>
-      </p:sp>
-      <p:sp>
-        <p:nvSpPr>
-          <p:cNvPr id="3" name="Rectangle 2">
-            <a:extLst>
-              <a:ext uri="{FF2B5EF4-FFF2-40B4-BE49-F238E27FC236}">
-                <a16:creationId xmlns:a16="http://schemas.microsoft.com/office/drawing/2014/main" id="{5F8B20F2-1371-4617-97ED-5FE54A785E72}"/>
-              </a:ext>
-            </a:extLst>
-          </p:cNvPr>
-          <p:cNvSpPr>
-            <a:spLocks noGrp="1"/>
-          </p:cNvSpPr>
-          <p:nvPr/>
-        </p:nvSpPr>
-        <p:spPr>
-          <a:xfrm>
-            <a:off x="676275" y="4972050"/>
-            <a:ext cx="10477500" cy="857250"/>
-          </a:xfrm>
-          <a:prstGeom prst="rect">
-            <a:avLst/>
-          </a:prstGeom>
-          <a:noFill/>
-          <a:ln w="0">
-            <a:noFill/>
-          </a:ln>
-        </p:spPr>
-        <p:txBody>
-          <a:bodyPr>
-            <a:noAutofit/>
-          </a:bodyPr>
-          <a:lstStyle/>
-          <a:p>
-            <a:pPr>
-              <a:defRPr sz="2400" b="0">
-                <a:solidFill>
-                  <a:srgbClr val="FFFFFF"/>
-                </a:solidFill>
-                <a:latin typeface="Helvetica Neue"/>
-                <a:ea typeface="Helvetica Neue"/>
-                <a:cs typeface="Helvetica Neue"/>
-              </a:defRPr>
-            </a:pPr>
-            <a:r>
-              <a:rPr sz="2400" b="0">
-                <a:solidFill>
-                  <a:srgbClr val="FFFFFF"/>
-                </a:solidFill>
-                <a:latin typeface="Helvetica Neue"/>
-                <a:ea typeface="Helvetica Neue"/>
-                <a:cs typeface="Helvetica Neue"/>
-              </a:rPr>
-              <a:t>Next: from one route to citywide accessibility</a:t>
             </a:r>
           </a:p>
         </p:txBody>
@@ -34168,7 +34111,7 @@
                     <a:lstStyle/>
                     <a:p>
                       <a:r>
-                        <a:rPr sz="2100" b="0">
+                        <a:rPr sz="2100" b="0" dirty="0">
                           <a:solidFill>
                             <a:srgbClr val="243136"/>
                           </a:solidFill>
@@ -34223,7 +34166,7 @@
                     <a:lstStyle/>
                     <a:p>
                       <a:r>
-                        <a:rPr sz="2100" b="0">
+                        <a:rPr sz="2100" b="0" dirty="0" err="1">
                           <a:solidFill>
                             <a:srgbClr val="243136"/>
                           </a:solidFill>
@@ -34233,6 +34176,14 @@
                         </a:rPr>
                         <a:t>motor_vehicle</a:t>
                       </a:r>
+                      <a:endParaRPr sz="2100" b="0" dirty="0">
+                        <a:solidFill>
+                          <a:srgbClr val="243136"/>
+                        </a:solidFill>
+                        <a:latin typeface="Helvetica Neue"/>
+                        <a:ea typeface="Helvetica Neue"/>
+                        <a:cs typeface="Helvetica Neue"/>
+                      </a:endParaRPr>
                     </a:p>
                   </a:txBody>
                   <a:tcPr>
@@ -34278,7 +34229,7 @@
                     <a:lstStyle/>
                     <a:p>
                       <a:r>
-                        <a:rPr sz="2100" b="0">
+                        <a:rPr sz="2100" b="0" dirty="0">
                           <a:solidFill>
                             <a:srgbClr val="243136"/>
                           </a:solidFill>
@@ -34302,7 +34253,7 @@
                     <a:lstStyle/>
                     <a:p>
                       <a:r>
-                        <a:rPr sz="2100" b="0">
+                        <a:rPr sz="2100" b="0" dirty="0">
                           <a:solidFill>
                             <a:srgbClr val="243136"/>
                           </a:solidFill>
